--- a/Проект (1).pptx
+++ b/Проект (1).pptx
@@ -125,7 +125,7 @@
   </p:defaultTextStyle>
   <p:extLst>
     <p:ext uri="{EFAFB233-063F-42B5-8137-9DF3F51BA10A}">
-      <p15:sldGuideLst xmlns:p15="http://schemas.microsoft.com/office/powerpoint/2012/main" xmlns="">
+      <p15:sldGuideLst xmlns="" xmlns:p15="http://schemas.microsoft.com/office/powerpoint/2012/main">
         <p15:guide id="1" orient="horz" pos="2160">
           <p15:clr>
             <a:srgbClr val="A4A3A4"/>
@@ -4503,7 +4503,7 @@
     </p:spTree>
     <p:extLst>
       <p:ext uri="{BB962C8B-B14F-4D97-AF65-F5344CB8AC3E}">
-        <p14:creationId xmlns:p14="http://schemas.microsoft.com/office/powerpoint/2010/main" xmlns="" val="3068324497"/>
+        <p14:creationId xmlns="" xmlns:p14="http://schemas.microsoft.com/office/powerpoint/2010/main" val="3068324497"/>
       </p:ext>
     </p:extLst>
   </p:cSld>
@@ -4625,7 +4625,7 @@
     </p:spTree>
     <p:extLst>
       <p:ext uri="{BB962C8B-B14F-4D97-AF65-F5344CB8AC3E}">
-        <p14:creationId xmlns:p14="http://schemas.microsoft.com/office/powerpoint/2010/main" xmlns="" val="1545035542"/>
+        <p14:creationId xmlns="" xmlns:p14="http://schemas.microsoft.com/office/powerpoint/2010/main" val="1545035542"/>
       </p:ext>
     </p:extLst>
   </p:cSld>
@@ -4718,14 +4718,12 @@
           </a:p>
           <a:p>
             <a:r>
-              <a:rPr lang="ru-RU" dirty="0"/>
-              <a:t>Тест мобильной версии (меню-бургер, адаптивные блоки).</a:t>
-            </a:r>
-          </a:p>
-          <a:p>
-            <a:r>
-              <a:rPr lang="ru-RU" dirty="0"/>
-              <a:t>Проверка работы форм (например, форма заявки).</a:t>
+              <a:rPr lang="ru-RU" smtClean="0"/>
+              <a:t>Проверка </a:t>
+            </a:r>
+            <a:r>
+              <a:rPr lang="ru-RU" dirty="0"/>
+              <a:t>работы форм (например, форма заявки).</a:t>
             </a:r>
           </a:p>
           <a:p>
@@ -4742,7 +4740,7 @@
     </p:spTree>
     <p:extLst>
       <p:ext uri="{BB962C8B-B14F-4D97-AF65-F5344CB8AC3E}">
-        <p14:creationId xmlns:p14="http://schemas.microsoft.com/office/powerpoint/2010/main" xmlns="" val="2249479996"/>
+        <p14:creationId xmlns="" xmlns:p14="http://schemas.microsoft.com/office/powerpoint/2010/main" val="2249479996"/>
       </p:ext>
     </p:extLst>
   </p:cSld>
@@ -4837,7 +4835,7 @@
     </p:spTree>
     <p:extLst>
       <p:ext uri="{BB962C8B-B14F-4D97-AF65-F5344CB8AC3E}">
-        <p14:creationId xmlns:p14="http://schemas.microsoft.com/office/powerpoint/2010/main" xmlns="" val="74891135"/>
+        <p14:creationId xmlns="" xmlns:p14="http://schemas.microsoft.com/office/powerpoint/2010/main" val="74891135"/>
       </p:ext>
     </p:extLst>
   </p:cSld>
@@ -4893,7 +4891,7 @@
           <p:cNvPr id="3" name="Объект 2">
             <a:extLst>
               <a:ext uri="{FF2B5EF4-FFF2-40B4-BE49-F238E27FC236}">
-                <a16:creationId xmlns:a16="http://schemas.microsoft.com/office/drawing/2014/main" xmlns="" id="{94F78293-A4EC-45F3-BD30-EC81903E0C2E}"/>
+                <a16:creationId xmlns="" xmlns:a16="http://schemas.microsoft.com/office/drawing/2014/main" id="{94F78293-A4EC-45F3-BD30-EC81903E0C2E}"/>
               </a:ext>
             </a:extLst>
           </p:cNvPr>
@@ -4923,7 +4921,7 @@
     </p:spTree>
     <p:extLst>
       <p:ext uri="{BB962C8B-B14F-4D97-AF65-F5344CB8AC3E}">
-        <p14:creationId xmlns:p14="http://schemas.microsoft.com/office/powerpoint/2010/main" xmlns="" val="1518231268"/>
+        <p14:creationId xmlns="" xmlns:p14="http://schemas.microsoft.com/office/powerpoint/2010/main" val="1518231268"/>
       </p:ext>
     </p:extLst>
   </p:cSld>
@@ -4979,7 +4977,7 @@
           <p:cNvPr id="4" name="Рисунок 3">
             <a:extLst>
               <a:ext uri="{FF2B5EF4-FFF2-40B4-BE49-F238E27FC236}">
-                <a16:creationId xmlns:a16="http://schemas.microsoft.com/office/drawing/2014/main" xmlns="" id="{8EE1B11B-D9E9-4206-A031-5DC11D8D4A37}"/>
+                <a16:creationId xmlns="" xmlns:a16="http://schemas.microsoft.com/office/drawing/2014/main" id="{8EE1B11B-D9E9-4206-A031-5DC11D8D4A37}"/>
               </a:ext>
             </a:extLst>
           </p:cNvPr>
@@ -5006,7 +5004,7 @@
     </p:spTree>
     <p:extLst>
       <p:ext uri="{BB962C8B-B14F-4D97-AF65-F5344CB8AC3E}">
-        <p14:creationId xmlns:p14="http://schemas.microsoft.com/office/powerpoint/2010/main" xmlns="" val="170843709"/>
+        <p14:creationId xmlns="" xmlns:p14="http://schemas.microsoft.com/office/powerpoint/2010/main" val="170843709"/>
       </p:ext>
     </p:extLst>
   </p:cSld>
@@ -5067,7 +5065,7 @@
           <p:cNvPr id="7" name="Рисунок 6">
             <a:extLst>
               <a:ext uri="{FF2B5EF4-FFF2-40B4-BE49-F238E27FC236}">
-                <a16:creationId xmlns:a16="http://schemas.microsoft.com/office/drawing/2014/main" xmlns="" id="{6F5B69EA-A49F-4094-9962-C3398CA5E334}"/>
+                <a16:creationId xmlns="" xmlns:a16="http://schemas.microsoft.com/office/drawing/2014/main" id="{6F5B69EA-A49F-4094-9962-C3398CA5E334}"/>
               </a:ext>
             </a:extLst>
           </p:cNvPr>
@@ -5094,7 +5092,7 @@
     </p:spTree>
     <p:extLst>
       <p:ext uri="{BB962C8B-B14F-4D97-AF65-F5344CB8AC3E}">
-        <p14:creationId xmlns:p14="http://schemas.microsoft.com/office/powerpoint/2010/main" xmlns="" val="1165963004"/>
+        <p14:creationId xmlns="" xmlns:p14="http://schemas.microsoft.com/office/powerpoint/2010/main" val="1165963004"/>
       </p:ext>
     </p:extLst>
   </p:cSld>
@@ -5155,7 +5153,7 @@
           <p:cNvPr id="7" name="Объект 6">
             <a:extLst>
               <a:ext uri="{FF2B5EF4-FFF2-40B4-BE49-F238E27FC236}">
-                <a16:creationId xmlns:a16="http://schemas.microsoft.com/office/drawing/2014/main" xmlns="" id="{12BAF446-3ED5-44CD-BAC3-4BCB8A8BB5FB}"/>
+                <a16:creationId xmlns="" xmlns:a16="http://schemas.microsoft.com/office/drawing/2014/main" id="{12BAF446-3ED5-44CD-BAC3-4BCB8A8BB5FB}"/>
               </a:ext>
             </a:extLst>
           </p:cNvPr>
@@ -5184,7 +5182,7 @@
     </p:spTree>
     <p:extLst>
       <p:ext uri="{BB962C8B-B14F-4D97-AF65-F5344CB8AC3E}">
-        <p14:creationId xmlns:p14="http://schemas.microsoft.com/office/powerpoint/2010/main" xmlns="" val="3372904283"/>
+        <p14:creationId xmlns="" xmlns:p14="http://schemas.microsoft.com/office/powerpoint/2010/main" val="3372904283"/>
       </p:ext>
     </p:extLst>
   </p:cSld>
@@ -5245,7 +5243,7 @@
           <p:cNvPr id="7" name="Объект 6">
             <a:extLst>
               <a:ext uri="{FF2B5EF4-FFF2-40B4-BE49-F238E27FC236}">
-                <a16:creationId xmlns:a16="http://schemas.microsoft.com/office/drawing/2014/main" xmlns="" id="{12BAF446-3ED5-44CD-BAC3-4BCB8A8BB5FB}"/>
+                <a16:creationId xmlns="" xmlns:a16="http://schemas.microsoft.com/office/drawing/2014/main" id="{12BAF446-3ED5-44CD-BAC3-4BCB8A8BB5FB}"/>
               </a:ext>
             </a:extLst>
           </p:cNvPr>
@@ -5274,7 +5272,7 @@
     </p:spTree>
     <p:extLst>
       <p:ext uri="{BB962C8B-B14F-4D97-AF65-F5344CB8AC3E}">
-        <p14:creationId xmlns:p14="http://schemas.microsoft.com/office/powerpoint/2010/main" xmlns="" val="3566117059"/>
+        <p14:creationId xmlns="" xmlns:p14="http://schemas.microsoft.com/office/powerpoint/2010/main" val="3566117059"/>
       </p:ext>
     </p:extLst>
   </p:cSld>
@@ -5428,7 +5426,7 @@
           <p:cNvPr id="2" name="TextBox 1">
             <a:extLst>
               <a:ext uri="{FF2B5EF4-FFF2-40B4-BE49-F238E27FC236}">
-                <a16:creationId xmlns:a16="http://schemas.microsoft.com/office/drawing/2014/main" xmlns="" id="{292B77DA-2205-411A-88CB-33BADFE711B2}"/>
+                <a16:creationId xmlns="" xmlns:a16="http://schemas.microsoft.com/office/drawing/2014/main" id="{292B77DA-2205-411A-88CB-33BADFE711B2}"/>
               </a:ext>
             </a:extLst>
           </p:cNvPr>
@@ -5461,7 +5459,7 @@
     </p:spTree>
     <p:extLst>
       <p:ext uri="{BB962C8B-B14F-4D97-AF65-F5344CB8AC3E}">
-        <p14:creationId xmlns:p14="http://schemas.microsoft.com/office/powerpoint/2010/main" xmlns="" val="17013337"/>
+        <p14:creationId xmlns="" xmlns:p14="http://schemas.microsoft.com/office/powerpoint/2010/main" val="17013337"/>
       </p:ext>
     </p:extLst>
   </p:cSld>
@@ -5725,7 +5723,7 @@
           <p:cNvPr id="8" name="Рисунок 7">
             <a:extLst>
               <a:ext uri="{FF2B5EF4-FFF2-40B4-BE49-F238E27FC236}">
-                <a16:creationId xmlns:a16="http://schemas.microsoft.com/office/drawing/2014/main" xmlns="" id="{4D153F9B-B18B-4A6B-9AB2-291A7019CE0C}"/>
+                <a16:creationId xmlns="" xmlns:a16="http://schemas.microsoft.com/office/drawing/2014/main" id="{4D153F9B-B18B-4A6B-9AB2-291A7019CE0C}"/>
               </a:ext>
             </a:extLst>
           </p:cNvPr>
@@ -5738,7 +5736,7 @@
           <a:blip r:embed="rId2">
             <a:extLst>
               <a:ext uri="{28A0092B-C50C-407E-A947-70E740481C1C}">
-                <a14:useLocalDpi xmlns:a14="http://schemas.microsoft.com/office/drawing/2010/main" xmlns="" val="0"/>
+                <a14:useLocalDpi xmlns="" xmlns:a14="http://schemas.microsoft.com/office/drawing/2010/main" val="0"/>
               </a:ext>
             </a:extLst>
           </a:blip>
@@ -5759,7 +5757,7 @@
     </p:spTree>
     <p:extLst>
       <p:ext uri="{BB962C8B-B14F-4D97-AF65-F5344CB8AC3E}">
-        <p14:creationId xmlns:p14="http://schemas.microsoft.com/office/powerpoint/2010/main" xmlns="" val="2196420824"/>
+        <p14:creationId xmlns="" xmlns:p14="http://schemas.microsoft.com/office/powerpoint/2010/main" val="2196420824"/>
       </p:ext>
     </p:extLst>
   </p:cSld>
@@ -5820,7 +5818,7 @@
           <p:cNvPr id="4" name="Рисунок 3">
             <a:extLst>
               <a:ext uri="{FF2B5EF4-FFF2-40B4-BE49-F238E27FC236}">
-                <a16:creationId xmlns:a16="http://schemas.microsoft.com/office/drawing/2014/main" xmlns="" id="{DBC1578C-AE48-4DB0-B1CC-ADD60670BD2E}"/>
+                <a16:creationId xmlns="" xmlns:a16="http://schemas.microsoft.com/office/drawing/2014/main" id="{DBC1578C-AE48-4DB0-B1CC-ADD60670BD2E}"/>
               </a:ext>
             </a:extLst>
           </p:cNvPr>
@@ -5833,7 +5831,7 @@
           <a:blip r:embed="rId2">
             <a:extLst>
               <a:ext uri="{28A0092B-C50C-407E-A947-70E740481C1C}">
-                <a14:useLocalDpi xmlns:a14="http://schemas.microsoft.com/office/drawing/2010/main" xmlns="" val="0"/>
+                <a14:useLocalDpi xmlns="" xmlns:a14="http://schemas.microsoft.com/office/drawing/2010/main" val="0"/>
               </a:ext>
             </a:extLst>
           </a:blip>
@@ -5854,7 +5852,7 @@
     </p:spTree>
     <p:extLst>
       <p:ext uri="{BB962C8B-B14F-4D97-AF65-F5344CB8AC3E}">
-        <p14:creationId xmlns:p14="http://schemas.microsoft.com/office/powerpoint/2010/main" xmlns="" val="1170835654"/>
+        <p14:creationId xmlns="" xmlns:p14="http://schemas.microsoft.com/office/powerpoint/2010/main" val="1170835654"/>
       </p:ext>
     </p:extLst>
   </p:cSld>
@@ -5915,7 +5913,7 @@
           <p:cNvPr id="5" name="Рисунок 4">
             <a:extLst>
               <a:ext uri="{FF2B5EF4-FFF2-40B4-BE49-F238E27FC236}">
-                <a16:creationId xmlns:a16="http://schemas.microsoft.com/office/drawing/2014/main" xmlns="" id="{58887DF8-40AE-48B7-A55C-FE6CF9739868}"/>
+                <a16:creationId xmlns="" xmlns:a16="http://schemas.microsoft.com/office/drawing/2014/main" id="{58887DF8-40AE-48B7-A55C-FE6CF9739868}"/>
               </a:ext>
             </a:extLst>
           </p:cNvPr>
@@ -5928,7 +5926,7 @@
           <a:blip r:embed="rId2">
             <a:extLst>
               <a:ext uri="{28A0092B-C50C-407E-A947-70E740481C1C}">
-                <a14:useLocalDpi xmlns:a14="http://schemas.microsoft.com/office/drawing/2010/main" xmlns="" val="0"/>
+                <a14:useLocalDpi xmlns="" xmlns:a14="http://schemas.microsoft.com/office/drawing/2010/main" val="0"/>
               </a:ext>
             </a:extLst>
           </a:blip>
@@ -5949,7 +5947,7 @@
     </p:spTree>
     <p:extLst>
       <p:ext uri="{BB962C8B-B14F-4D97-AF65-F5344CB8AC3E}">
-        <p14:creationId xmlns:p14="http://schemas.microsoft.com/office/powerpoint/2010/main" xmlns="" val="3546792274"/>
+        <p14:creationId xmlns="" xmlns:p14="http://schemas.microsoft.com/office/powerpoint/2010/main" val="3546792274"/>
       </p:ext>
     </p:extLst>
   </p:cSld>
@@ -6072,7 +6070,7 @@
     </p:spTree>
     <p:extLst>
       <p:ext uri="{BB962C8B-B14F-4D97-AF65-F5344CB8AC3E}">
-        <p14:creationId xmlns:p14="http://schemas.microsoft.com/office/powerpoint/2010/main" xmlns="" val="933868138"/>
+        <p14:creationId xmlns="" xmlns:p14="http://schemas.microsoft.com/office/powerpoint/2010/main" val="933868138"/>
       </p:ext>
     </p:extLst>
   </p:cSld>
@@ -6189,7 +6187,7 @@
     </p:spTree>
     <p:extLst>
       <p:ext uri="{BB962C8B-B14F-4D97-AF65-F5344CB8AC3E}">
-        <p14:creationId xmlns:p14="http://schemas.microsoft.com/office/powerpoint/2010/main" xmlns="" val="233974317"/>
+        <p14:creationId xmlns="" xmlns:p14="http://schemas.microsoft.com/office/powerpoint/2010/main" val="233974317"/>
       </p:ext>
     </p:extLst>
   </p:cSld>
